--- a/docs/templates/proposal-template.pptx
+++ b/docs/templates/proposal-template.pptx
@@ -1398,7 +1398,7 @@
         </p:nvSpPr>
         <p:spPr>
           <a:xfrm>
-            <a:off x="7772400" y="5760720"/>
+            <a:off x="7772400" y="5486400"/>
             <a:ext cx="3931920" cy="640080"/>
           </a:xfrm>
           <a:prstGeom prst="rect">

--- a/docs/templates/proposal-template.pptx
+++ b/docs/templates/proposal-template.pptx
@@ -1296,9 +1296,32 @@
           <a:chExt cx="0" cy="0"/>
         </a:xfrm>
       </p:grpSpPr>
+      <p:sp>
+        <p:nvSpPr>
+          <p:cNvPr id="2" name="Shape 0"/>
+          <p:cNvSpPr/>
+          <p:nvPr/>
+        </p:nvSpPr>
+        <p:spPr>
+          <a:xfrm>
+            <a:off x="0" y="640080"/>
+            <a:ext cx="12191695" cy="0"/>
+          </a:xfrm>
+          <a:prstGeom prst="line">
+            <a:avLst/>
+          </a:prstGeom>
+          <a:noFill/>
+          <a:ln w="9525">
+            <a:solidFill>
+              <a:srgbClr val="EEEEEE"/>
+            </a:solidFill>
+            <a:prstDash val="solid"/>
+          </a:ln>
+        </p:spPr>
+      </p:sp>
       <p:pic>
         <p:nvPicPr>
-          <p:cNvPr id="2" name="Image 0" descr="/Users/phoenixlab/Projects/sharp/sharpdigital-proposal-template/img/sharp_logo.svg">    </p:cNvPr>
+          <p:cNvPr id="3" name="Image 0" descr="/Users/phoenixlab/Projects/sharp/sharpdigital-proposal-template/img/sharp_logo.svg">    </p:cNvPr>
           <p:cNvPicPr>
             <a:picLocks noChangeAspect="1"/>
           </p:cNvPicPr>
@@ -1318,7 +1341,7 @@
         </p:blipFill>
         <p:spPr>
           <a:xfrm>
-            <a:off x="457200" y="365760"/>
+            <a:off x="457200" y="137160"/>
             <a:ext cx="1280160" cy="365760"/>
           </a:xfrm>
           <a:prstGeom prst="rect">
@@ -1326,16 +1349,61 @@
           </a:prstGeom>
         </p:spPr>
       </p:pic>
-      <p:sp>
-        <p:nvSpPr>
-          <p:cNvPr id="3" name="Text 0"/>
-          <p:cNvSpPr/>
-          <p:nvPr/>
-        </p:nvSpPr>
-        <p:spPr>
-          <a:xfrm>
-            <a:off x="822960" y="2377440"/>
-            <a:ext cx="10515600" cy="1097280"/>
+      <p:pic>
+        <p:nvPicPr>
+          <p:cNvPr id="4" name="Image 1" descr="/Users/phoenixlab/Projects/sharp/sharpdigital-proposal-template/public/img/services_bg.jpg">    </p:cNvPr>
+          <p:cNvPicPr>
+            <a:picLocks noChangeAspect="1"/>
+          </p:cNvPicPr>
+          <p:nvPr/>
+        </p:nvPicPr>
+        <p:blipFill>
+          <a:blip r:embed="rId3"/>
+          <a:srcRect l="0" r="0" t="0" b="0"/>
+          <a:stretch/>
+        </p:blipFill>
+        <p:spPr>
+          <a:xfrm>
+            <a:off x="0" y="640080"/>
+            <a:ext cx="12191695" cy="5760720"/>
+          </a:xfrm>
+          <a:prstGeom prst="rect">
+            <a:avLst/>
+          </a:prstGeom>
+        </p:spPr>
+      </p:pic>
+      <p:sp>
+        <p:nvSpPr>
+          <p:cNvPr id="5" name="Shape 1"/>
+          <p:cNvSpPr/>
+          <p:nvPr/>
+        </p:nvSpPr>
+        <p:spPr>
+          <a:xfrm>
+            <a:off x="0" y="640080"/>
+            <a:ext cx="12191695" cy="5760720"/>
+          </a:xfrm>
+          <a:prstGeom prst="rect">
+            <a:avLst/>
+          </a:prstGeom>
+          <a:solidFill>
+            <a:srgbClr val="333333">
+              <a:alpha val="65000"/>
+            </a:srgbClr>
+          </a:solidFill>
+          <a:ln/>
+        </p:spPr>
+      </p:sp>
+      <p:sp>
+        <p:nvSpPr>
+          <p:cNvPr id="6" name="Text 2"/>
+          <p:cNvSpPr/>
+          <p:nvPr/>
+        </p:nvSpPr>
+        <p:spPr>
+          <a:xfrm>
+            <a:off x="822960" y="2194560"/>
+            <a:ext cx="10515600" cy="1463040"/>
           </a:xfrm>
           <a:prstGeom prst="rect">
             <a:avLst/>
@@ -1353,7 +1421,7 @@
             <a:r>
               <a:rPr lang="en-US" sz="6000" dirty="0">
                 <a:solidFill>
-                  <a:srgbClr val="333333"/>
+                  <a:srgbClr val="FFFFFF"/>
                 </a:solidFill>
                 <a:latin typeface="Manrope" pitchFamily="34" charset="0"/>
                 <a:ea typeface="Manrope" pitchFamily="34" charset="-122"/>
@@ -1367,13 +1435,13 @@
       </p:sp>
       <p:sp>
         <p:nvSpPr>
-          <p:cNvPr id="4" name="Shape 1"/>
-          <p:cNvSpPr/>
-          <p:nvPr/>
-        </p:nvSpPr>
-        <p:spPr>
-          <a:xfrm>
-            <a:off x="822960" y="3611880"/>
+          <p:cNvPr id="7" name="Shape 3"/>
+          <p:cNvSpPr/>
+          <p:nvPr/>
+        </p:nvSpPr>
+        <p:spPr>
+          <a:xfrm>
+            <a:off x="822960" y="3840480"/>
             <a:ext cx="5486400" cy="54864"/>
           </a:xfrm>
           <a:prstGeom prst="rect">
@@ -1392,7 +1460,7 @@
       </p:sp>
       <p:sp>
         <p:nvSpPr>
-          <p:cNvPr id="5" name="Text 2"/>
+          <p:cNvPr id="8" name="Text 4"/>
           <p:cNvSpPr/>
           <p:nvPr/>
         </p:nvSpPr>
@@ -1417,7 +1485,7 @@
             <a:r>
               <a:rPr lang="en-US" sz="1400" dirty="0">
                 <a:solidFill>
-                  <a:srgbClr val="333333"/>
+                  <a:srgbClr val="FFFFFF"/>
                 </a:solidFill>
                 <a:latin typeface="Inter" pitchFamily="34" charset="0"/>
                 <a:ea typeface="Inter" pitchFamily="34" charset="-122"/>
@@ -1437,7 +1505,7 @@
             <a:r>
               <a:rPr lang="en-US" sz="1400" dirty="0">
                 <a:solidFill>
-                  <a:srgbClr val="333333"/>
+                  <a:srgbClr val="FFFFFF"/>
                 </a:solidFill>
                 <a:latin typeface="Inter" pitchFamily="34" charset="0"/>
                 <a:ea typeface="Inter" pitchFamily="34" charset="-122"/>
@@ -1476,14 +1544,112 @@
       </p:grpSpPr>
       <p:sp>
         <p:nvSpPr>
-          <p:cNvPr id="2" name="Text 0"/>
+          <p:cNvPr id="2" name="Shape 0"/>
+          <p:cNvSpPr/>
+          <p:nvPr/>
+        </p:nvSpPr>
+        <p:spPr>
+          <a:xfrm>
+            <a:off x="0" y="640080"/>
+            <a:ext cx="12191695" cy="0"/>
+          </a:xfrm>
+          <a:prstGeom prst="line">
+            <a:avLst/>
+          </a:prstGeom>
+          <a:noFill/>
+          <a:ln w="9525">
+            <a:solidFill>
+              <a:srgbClr val="EEEEEE"/>
+            </a:solidFill>
+            <a:prstDash val="solid"/>
+          </a:ln>
+        </p:spPr>
+      </p:sp>
+      <p:pic>
+        <p:nvPicPr>
+          <p:cNvPr id="3" name="Image 0" descr="/Users/phoenixlab/Projects/sharp/sharpdigital-proposal-template/img/sharp_logo.svg">    </p:cNvPr>
+          <p:cNvPicPr>
+            <a:picLocks noChangeAspect="1"/>
+          </p:cNvPicPr>
+          <p:nvPr/>
+        </p:nvPicPr>
+        <p:blipFill>
+          <a:blip r:embed="rId1">
+            <a:extLst>
+              <a:ext uri="{96DAC541-7B7A-43D3-8B79-37D633B846F1}">
+                <asvg:svgBlip xmlns:asvg="http://schemas.microsoft.com/office/drawing/2016/SVG/main" r:embed="rId2"/>
+              </a:ext>
+            </a:extLst>
+          </a:blip>
+          <a:stretch>
+            <a:fillRect/>
+          </a:stretch>
+        </p:blipFill>
+        <p:spPr>
+          <a:xfrm>
+            <a:off x="457200" y="137160"/>
+            <a:ext cx="1280160" cy="365760"/>
+          </a:xfrm>
+          <a:prstGeom prst="rect">
+            <a:avLst/>
+          </a:prstGeom>
+        </p:spPr>
+      </p:pic>
+      <p:pic>
+        <p:nvPicPr>
+          <p:cNvPr id="4" name="Image 1" descr="/Users/phoenixlab/Projects/sharp/sharpdigital-proposal-template/public/img/about_bg.jpg">    </p:cNvPr>
+          <p:cNvPicPr>
+            <a:picLocks noChangeAspect="1"/>
+          </p:cNvPicPr>
+          <p:nvPr/>
+        </p:nvPicPr>
+        <p:blipFill>
+          <a:blip r:embed="rId3"/>
+          <a:srcRect l="0" r="0" t="0" b="0"/>
+          <a:stretch/>
+        </p:blipFill>
+        <p:spPr>
+          <a:xfrm>
+            <a:off x="0" y="640080"/>
+            <a:ext cx="12191695" cy="1691640"/>
+          </a:xfrm>
+          <a:prstGeom prst="rect">
+            <a:avLst/>
+          </a:prstGeom>
+        </p:spPr>
+      </p:pic>
+      <p:sp>
+        <p:nvSpPr>
+          <p:cNvPr id="5" name="Shape 1"/>
+          <p:cNvSpPr/>
+          <p:nvPr/>
+        </p:nvSpPr>
+        <p:spPr>
+          <a:xfrm>
+            <a:off x="0" y="640080"/>
+            <a:ext cx="12191695" cy="1691640"/>
+          </a:xfrm>
+          <a:prstGeom prst="rect">
+            <a:avLst/>
+          </a:prstGeom>
+          <a:solidFill>
+            <a:srgbClr val="333333">
+              <a:alpha val="65000"/>
+            </a:srgbClr>
+          </a:solidFill>
+          <a:ln/>
+        </p:spPr>
+      </p:sp>
+      <p:sp>
+        <p:nvSpPr>
+          <p:cNvPr id="6" name="Text 2"/>
           <p:cNvSpPr/>
           <p:nvPr/>
         </p:nvSpPr>
         <p:spPr>
           <a:xfrm>
             <a:off x="822960" y="640080"/>
-            <a:ext cx="10515600" cy="640080"/>
+            <a:ext cx="10515600" cy="1691640"/>
           </a:xfrm>
           <a:prstGeom prst="rect">
             <a:avLst/>
@@ -1501,7 +1667,7 @@
             <a:r>
               <a:rPr lang="en-US" sz="3600" dirty="0">
                 <a:solidFill>
-                  <a:srgbClr val="333333"/>
+                  <a:srgbClr val="FFFFFF"/>
                 </a:solidFill>
                 <a:latin typeface="Manrope" pitchFamily="34" charset="0"/>
                 <a:ea typeface="Manrope" pitchFamily="34" charset="-122"/>
@@ -1515,14 +1681,14 @@
       </p:sp>
       <p:sp>
         <p:nvSpPr>
-          <p:cNvPr id="3" name="Shape 1"/>
-          <p:cNvSpPr/>
-          <p:nvPr/>
-        </p:nvSpPr>
-        <p:spPr>
-          <a:xfrm>
-            <a:off x="822960" y="1325880"/>
-            <a:ext cx="2743200" cy="36576"/>
+          <p:cNvPr id="7" name="Shape 3"/>
+          <p:cNvSpPr/>
+          <p:nvPr/>
+        </p:nvSpPr>
+        <p:spPr>
+          <a:xfrm>
+            <a:off x="822960" y="2221992"/>
+            <a:ext cx="1645920" cy="54864"/>
           </a:xfrm>
           <a:prstGeom prst="rect">
             <a:avLst/>
@@ -1540,13 +1706,13 @@
       </p:sp>
       <p:sp>
         <p:nvSpPr>
-          <p:cNvPr id="4" name="Text 2"/>
-          <p:cNvSpPr/>
-          <p:nvPr/>
-        </p:nvSpPr>
-        <p:spPr>
-          <a:xfrm>
-            <a:off x="822960" y="1737360"/>
+          <p:cNvPr id="8" name="Text 4"/>
+          <p:cNvSpPr/>
+          <p:nvPr/>
+        </p:nvSpPr>
+        <p:spPr>
+          <a:xfrm>
+            <a:off x="822960" y="2468880"/>
             <a:ext cx="5029200" cy="365760"/>
           </a:xfrm>
           <a:prstGeom prst="rect">
@@ -1579,14 +1745,14 @@
       </p:sp>
       <p:sp>
         <p:nvSpPr>
-          <p:cNvPr id="5" name="Text 3"/>
-          <p:cNvSpPr/>
-          <p:nvPr/>
-        </p:nvSpPr>
-        <p:spPr>
-          <a:xfrm>
-            <a:off x="822960" y="2103120"/>
-            <a:ext cx="5029200" cy="3657600"/>
+          <p:cNvPr id="9" name="Text 5"/>
+          <p:cNvSpPr/>
+          <p:nvPr/>
+        </p:nvSpPr>
+        <p:spPr>
+          <a:xfrm>
+            <a:off x="822960" y="2880360"/>
+            <a:ext cx="5029200" cy="3474720"/>
           </a:xfrm>
           <a:prstGeom prst="rect">
             <a:avLst/>
@@ -1664,13 +1830,13 @@
       </p:sp>
       <p:sp>
         <p:nvSpPr>
-          <p:cNvPr id="6" name="Text 4"/>
-          <p:cNvSpPr/>
-          <p:nvPr/>
-        </p:nvSpPr>
-        <p:spPr>
-          <a:xfrm>
-            <a:off x="6400800" y="1737360"/>
+          <p:cNvPr id="10" name="Text 6"/>
+          <p:cNvSpPr/>
+          <p:nvPr/>
+        </p:nvSpPr>
+        <p:spPr>
+          <a:xfrm>
+            <a:off x="6400800" y="2468880"/>
             <a:ext cx="5029200" cy="365760"/>
           </a:xfrm>
           <a:prstGeom prst="rect">
@@ -1703,14 +1869,14 @@
       </p:sp>
       <p:sp>
         <p:nvSpPr>
-          <p:cNvPr id="7" name="Text 5"/>
-          <p:cNvSpPr/>
-          <p:nvPr/>
-        </p:nvSpPr>
-        <p:spPr>
-          <a:xfrm>
-            <a:off x="6400800" y="2103120"/>
-            <a:ext cx="5029200" cy="3657600"/>
+          <p:cNvPr id="11" name="Text 7"/>
+          <p:cNvSpPr/>
+          <p:nvPr/>
+        </p:nvSpPr>
+        <p:spPr>
+          <a:xfrm>
+            <a:off x="6400800" y="2880360"/>
+            <a:ext cx="5029200" cy="3474720"/>
           </a:xfrm>
           <a:prstGeom prst="rect">
             <a:avLst/>
@@ -1834,14 +2000,112 @@
       </p:grpSpPr>
       <p:sp>
         <p:nvSpPr>
-          <p:cNvPr id="2" name="Text 0"/>
+          <p:cNvPr id="2" name="Shape 0"/>
+          <p:cNvSpPr/>
+          <p:nvPr/>
+        </p:nvSpPr>
+        <p:spPr>
+          <a:xfrm>
+            <a:off x="0" y="640080"/>
+            <a:ext cx="12191695" cy="0"/>
+          </a:xfrm>
+          <a:prstGeom prst="line">
+            <a:avLst/>
+          </a:prstGeom>
+          <a:noFill/>
+          <a:ln w="9525">
+            <a:solidFill>
+              <a:srgbClr val="EEEEEE"/>
+            </a:solidFill>
+            <a:prstDash val="solid"/>
+          </a:ln>
+        </p:spPr>
+      </p:sp>
+      <p:pic>
+        <p:nvPicPr>
+          <p:cNvPr id="3" name="Image 0" descr="/Users/phoenixlab/Projects/sharp/sharpdigital-proposal-template/img/sharp_logo.svg">    </p:cNvPr>
+          <p:cNvPicPr>
+            <a:picLocks noChangeAspect="1"/>
+          </p:cNvPicPr>
+          <p:nvPr/>
+        </p:nvPicPr>
+        <p:blipFill>
+          <a:blip r:embed="rId1">
+            <a:extLst>
+              <a:ext uri="{96DAC541-7B7A-43D3-8B79-37D633B846F1}">
+                <asvg:svgBlip xmlns:asvg="http://schemas.microsoft.com/office/drawing/2016/SVG/main" r:embed="rId2"/>
+              </a:ext>
+            </a:extLst>
+          </a:blip>
+          <a:stretch>
+            <a:fillRect/>
+          </a:stretch>
+        </p:blipFill>
+        <p:spPr>
+          <a:xfrm>
+            <a:off x="457200" y="137160"/>
+            <a:ext cx="1280160" cy="365760"/>
+          </a:xfrm>
+          <a:prstGeom prst="rect">
+            <a:avLst/>
+          </a:prstGeom>
+        </p:spPr>
+      </p:pic>
+      <p:pic>
+        <p:nvPicPr>
+          <p:cNvPr id="4" name="Image 1" descr="/Users/phoenixlab/Projects/sharp/sharpdigital-proposal-template/public/img/analyse.jpg">    </p:cNvPr>
+          <p:cNvPicPr>
+            <a:picLocks noChangeAspect="1"/>
+          </p:cNvPicPr>
+          <p:nvPr/>
+        </p:nvPicPr>
+        <p:blipFill>
+          <a:blip r:embed="rId3"/>
+          <a:srcRect l="0" r="0" t="0" b="0"/>
+          <a:stretch/>
+        </p:blipFill>
+        <p:spPr>
+          <a:xfrm>
+            <a:off x="0" y="640080"/>
+            <a:ext cx="12191695" cy="1691640"/>
+          </a:xfrm>
+          <a:prstGeom prst="rect">
+            <a:avLst/>
+          </a:prstGeom>
+        </p:spPr>
+      </p:pic>
+      <p:sp>
+        <p:nvSpPr>
+          <p:cNvPr id="5" name="Shape 1"/>
+          <p:cNvSpPr/>
+          <p:nvPr/>
+        </p:nvSpPr>
+        <p:spPr>
+          <a:xfrm>
+            <a:off x="0" y="640080"/>
+            <a:ext cx="12191695" cy="1691640"/>
+          </a:xfrm>
+          <a:prstGeom prst="rect">
+            <a:avLst/>
+          </a:prstGeom>
+          <a:solidFill>
+            <a:srgbClr val="333333">
+              <a:alpha val="65000"/>
+            </a:srgbClr>
+          </a:solidFill>
+          <a:ln/>
+        </p:spPr>
+      </p:sp>
+      <p:sp>
+        <p:nvSpPr>
+          <p:cNvPr id="6" name="Text 2"/>
           <p:cNvSpPr/>
           <p:nvPr/>
         </p:nvSpPr>
         <p:spPr>
           <a:xfrm>
             <a:off x="822960" y="640080"/>
-            <a:ext cx="10515600" cy="640080"/>
+            <a:ext cx="10515600" cy="1691640"/>
           </a:xfrm>
           <a:prstGeom prst="rect">
             <a:avLst/>
@@ -1853,13 +2117,13 @@
           <a:bodyPr wrap="square" rtlCol="0" anchor="ctr"/>
           <a:lstStyle/>
           <a:p>
-            <a:pPr indent="0" marL="0">
+            <a:pPr algn="l" indent="0" marL="0">
               <a:buNone/>
             </a:pPr>
             <a:r>
               <a:rPr lang="en-US" sz="3600" dirty="0">
                 <a:solidFill>
-                  <a:srgbClr val="333333"/>
+                  <a:srgbClr val="FFFFFF"/>
                 </a:solidFill>
                 <a:latin typeface="Manrope" pitchFamily="34" charset="0"/>
                 <a:ea typeface="Manrope" pitchFamily="34" charset="-122"/>
@@ -1873,14 +2137,14 @@
       </p:sp>
       <p:sp>
         <p:nvSpPr>
-          <p:cNvPr id="3" name="Shape 1"/>
-          <p:cNvSpPr/>
-          <p:nvPr/>
-        </p:nvSpPr>
-        <p:spPr>
-          <a:xfrm>
-            <a:off x="822960" y="1325880"/>
-            <a:ext cx="2743200" cy="36576"/>
+          <p:cNvPr id="7" name="Shape 3"/>
+          <p:cNvSpPr/>
+          <p:nvPr/>
+        </p:nvSpPr>
+        <p:spPr>
+          <a:xfrm>
+            <a:off x="822960" y="2221992"/>
+            <a:ext cx="1645920" cy="54864"/>
           </a:xfrm>
           <a:prstGeom prst="rect">
             <a:avLst/>
@@ -1898,14 +2162,14 @@
       </p:sp>
       <p:sp>
         <p:nvSpPr>
-          <p:cNvPr id="4" name="Text 2"/>
-          <p:cNvSpPr/>
-          <p:nvPr/>
-        </p:nvSpPr>
-        <p:spPr>
-          <a:xfrm>
-            <a:off x="822960" y="1828800"/>
-            <a:ext cx="10515600" cy="4114800"/>
+          <p:cNvPr id="8" name="Text 4"/>
+          <p:cNvSpPr/>
+          <p:nvPr/>
+        </p:nvSpPr>
+        <p:spPr>
+          <a:xfrm>
+            <a:off x="822960" y="2468880"/>
+            <a:ext cx="10515600" cy="3886200"/>
           </a:xfrm>
           <a:prstGeom prst="rect">
             <a:avLst/>
@@ -2050,14 +2314,112 @@
       </p:grpSpPr>
       <p:sp>
         <p:nvSpPr>
-          <p:cNvPr id="2" name="Text 0"/>
-          <p:cNvSpPr/>
-          <p:nvPr/>
-        </p:nvSpPr>
-        <p:spPr>
-          <a:xfrm>
-            <a:off x="822960" y="457200"/>
-            <a:ext cx="10515600" cy="548640"/>
+          <p:cNvPr id="2" name="Shape 0"/>
+          <p:cNvSpPr/>
+          <p:nvPr/>
+        </p:nvSpPr>
+        <p:spPr>
+          <a:xfrm>
+            <a:off x="0" y="640080"/>
+            <a:ext cx="12191695" cy="0"/>
+          </a:xfrm>
+          <a:prstGeom prst="line">
+            <a:avLst/>
+          </a:prstGeom>
+          <a:noFill/>
+          <a:ln w="9525">
+            <a:solidFill>
+              <a:srgbClr val="EEEEEE"/>
+            </a:solidFill>
+            <a:prstDash val="solid"/>
+          </a:ln>
+        </p:spPr>
+      </p:sp>
+      <p:pic>
+        <p:nvPicPr>
+          <p:cNvPr id="3" name="Image 0" descr="/Users/phoenixlab/Projects/sharp/sharpdigital-proposal-template/img/sharp_logo.svg">    </p:cNvPr>
+          <p:cNvPicPr>
+            <a:picLocks noChangeAspect="1"/>
+          </p:cNvPicPr>
+          <p:nvPr/>
+        </p:nvPicPr>
+        <p:blipFill>
+          <a:blip r:embed="rId1">
+            <a:extLst>
+              <a:ext uri="{96DAC541-7B7A-43D3-8B79-37D633B846F1}">
+                <asvg:svgBlip xmlns:asvg="http://schemas.microsoft.com/office/drawing/2016/SVG/main" r:embed="rId2"/>
+              </a:ext>
+            </a:extLst>
+          </a:blip>
+          <a:stretch>
+            <a:fillRect/>
+          </a:stretch>
+        </p:blipFill>
+        <p:spPr>
+          <a:xfrm>
+            <a:off x="457200" y="137160"/>
+            <a:ext cx="1280160" cy="365760"/>
+          </a:xfrm>
+          <a:prstGeom prst="rect">
+            <a:avLst/>
+          </a:prstGeom>
+        </p:spPr>
+      </p:pic>
+      <p:pic>
+        <p:nvPicPr>
+          <p:cNvPr id="4" name="Image 1" descr="/Users/phoenixlab/Projects/sharp/sharpdigital-proposal-template/public/img/automation.jpg">    </p:cNvPr>
+          <p:cNvPicPr>
+            <a:picLocks noChangeAspect="1"/>
+          </p:cNvPicPr>
+          <p:nvPr/>
+        </p:nvPicPr>
+        <p:blipFill>
+          <a:blip r:embed="rId3"/>
+          <a:srcRect l="0" r="0" t="0" b="0"/>
+          <a:stretch/>
+        </p:blipFill>
+        <p:spPr>
+          <a:xfrm>
+            <a:off x="0" y="640080"/>
+            <a:ext cx="12191695" cy="1691640"/>
+          </a:xfrm>
+          <a:prstGeom prst="rect">
+            <a:avLst/>
+          </a:prstGeom>
+        </p:spPr>
+      </p:pic>
+      <p:sp>
+        <p:nvSpPr>
+          <p:cNvPr id="5" name="Shape 1"/>
+          <p:cNvSpPr/>
+          <p:nvPr/>
+        </p:nvSpPr>
+        <p:spPr>
+          <a:xfrm>
+            <a:off x="0" y="640080"/>
+            <a:ext cx="12191695" cy="1691640"/>
+          </a:xfrm>
+          <a:prstGeom prst="rect">
+            <a:avLst/>
+          </a:prstGeom>
+          <a:solidFill>
+            <a:srgbClr val="333333">
+              <a:alpha val="65000"/>
+            </a:srgbClr>
+          </a:solidFill>
+          <a:ln/>
+        </p:spPr>
+      </p:sp>
+      <p:sp>
+        <p:nvSpPr>
+          <p:cNvPr id="6" name="Text 2"/>
+          <p:cNvSpPr/>
+          <p:nvPr/>
+        </p:nvSpPr>
+        <p:spPr>
+          <a:xfrm>
+            <a:off x="822960" y="640080"/>
+            <a:ext cx="10515600" cy="1691640"/>
           </a:xfrm>
           <a:prstGeom prst="rect">
             <a:avLst/>
@@ -2069,13 +2431,13 @@
           <a:bodyPr wrap="square" rtlCol="0" anchor="ctr"/>
           <a:lstStyle/>
           <a:p>
-            <a:pPr indent="0" marL="0">
+            <a:pPr algn="l" indent="0" marL="0">
               <a:buNone/>
             </a:pPr>
             <a:r>
               <a:rPr lang="en-US" sz="3600" dirty="0">
                 <a:solidFill>
-                  <a:srgbClr val="333333"/>
+                  <a:srgbClr val="FFFFFF"/>
                 </a:solidFill>
                 <a:latin typeface="Manrope" pitchFamily="34" charset="0"/>
                 <a:ea typeface="Manrope" pitchFamily="34" charset="-122"/>
@@ -2089,14 +2451,14 @@
       </p:sp>
       <p:sp>
         <p:nvSpPr>
-          <p:cNvPr id="3" name="Shape 1"/>
-          <p:cNvSpPr/>
-          <p:nvPr/>
-        </p:nvSpPr>
-        <p:spPr>
-          <a:xfrm>
-            <a:off x="822960" y="1051560"/>
-            <a:ext cx="2743200" cy="36576"/>
+          <p:cNvPr id="7" name="Shape 3"/>
+          <p:cNvSpPr/>
+          <p:nvPr/>
+        </p:nvSpPr>
+        <p:spPr>
+          <a:xfrm>
+            <a:off x="822960" y="2221992"/>
+            <a:ext cx="1645920" cy="54864"/>
           </a:xfrm>
           <a:prstGeom prst="rect">
             <a:avLst/>
@@ -2114,14 +2476,14 @@
       </p:sp>
       <p:sp>
         <p:nvSpPr>
-          <p:cNvPr id="4" name="Text 2"/>
-          <p:cNvSpPr/>
-          <p:nvPr/>
-        </p:nvSpPr>
-        <p:spPr>
-          <a:xfrm>
-            <a:off x="822960" y="1463040"/>
-            <a:ext cx="1965960" cy="365760"/>
+          <p:cNvPr id="8" name="Text 4"/>
+          <p:cNvSpPr/>
+          <p:nvPr/>
+        </p:nvSpPr>
+        <p:spPr>
+          <a:xfrm>
+            <a:off x="822960" y="2468880"/>
+            <a:ext cx="1965960" cy="320040"/>
           </a:xfrm>
           <a:prstGeom prst="rect">
             <a:avLst/>
@@ -2153,14 +2515,14 @@
       </p:sp>
       <p:sp>
         <p:nvSpPr>
-          <p:cNvPr id="5" name="Text 3"/>
-          <p:cNvSpPr/>
-          <p:nvPr/>
-        </p:nvSpPr>
-        <p:spPr>
-          <a:xfrm>
-            <a:off x="822960" y="1874520"/>
-            <a:ext cx="1965960" cy="1371600"/>
+          <p:cNvPr id="9" name="Text 5"/>
+          <p:cNvSpPr/>
+          <p:nvPr/>
+        </p:nvSpPr>
+        <p:spPr>
+          <a:xfrm>
+            <a:off x="822960" y="2834640"/>
+            <a:ext cx="1965960" cy="1188720"/>
           </a:xfrm>
           <a:prstGeom prst="rect">
             <a:avLst/>
@@ -2192,14 +2554,14 @@
       </p:sp>
       <p:sp>
         <p:nvSpPr>
-          <p:cNvPr id="6" name="Text 4"/>
-          <p:cNvSpPr/>
-          <p:nvPr/>
-        </p:nvSpPr>
-        <p:spPr>
-          <a:xfrm>
-            <a:off x="822960" y="3337560"/>
-            <a:ext cx="1965960" cy="1188720"/>
+          <p:cNvPr id="10" name="Text 6"/>
+          <p:cNvSpPr/>
+          <p:nvPr/>
+        </p:nvSpPr>
+        <p:spPr>
+          <a:xfrm>
+            <a:off x="822960" y="4114800"/>
+            <a:ext cx="1965960" cy="1051560"/>
           </a:xfrm>
           <a:prstGeom prst="rect">
             <a:avLst/>
@@ -2245,13 +2607,13 @@
       </p:sp>
       <p:sp>
         <p:nvSpPr>
-          <p:cNvPr id="7" name="Shape 5"/>
-          <p:cNvSpPr/>
-          <p:nvPr/>
-        </p:nvSpPr>
-        <p:spPr>
-          <a:xfrm>
-            <a:off x="822960" y="5074920"/>
+          <p:cNvPr id="11" name="Shape 7"/>
+          <p:cNvSpPr/>
+          <p:nvPr/>
+        </p:nvSpPr>
+        <p:spPr>
+          <a:xfrm>
+            <a:off x="822960" y="5257800"/>
             <a:ext cx="1965960" cy="0"/>
           </a:xfrm>
           <a:prstGeom prst="line">
@@ -2268,14 +2630,14 @@
       </p:sp>
       <p:sp>
         <p:nvSpPr>
-          <p:cNvPr id="8" name="Text 6"/>
-          <p:cNvSpPr/>
-          <p:nvPr/>
-        </p:nvSpPr>
-        <p:spPr>
-          <a:xfrm>
-            <a:off x="822960" y="5166360"/>
-            <a:ext cx="982980" cy="365760"/>
+          <p:cNvPr id="12" name="Text 8"/>
+          <p:cNvSpPr/>
+          <p:nvPr/>
+        </p:nvSpPr>
+        <p:spPr>
+          <a:xfrm>
+            <a:off x="822960" y="5349240"/>
+            <a:ext cx="982980" cy="320040"/>
           </a:xfrm>
           <a:prstGeom prst="rect">
             <a:avLst/>
@@ -2307,14 +2669,14 @@
       </p:sp>
       <p:sp>
         <p:nvSpPr>
-          <p:cNvPr id="9" name="Text 7"/>
-          <p:cNvSpPr/>
-          <p:nvPr/>
-        </p:nvSpPr>
-        <p:spPr>
-          <a:xfrm>
-            <a:off x="1805940" y="5166360"/>
-            <a:ext cx="982980" cy="365760"/>
+          <p:cNvPr id="13" name="Text 9"/>
+          <p:cNvSpPr/>
+          <p:nvPr/>
+        </p:nvSpPr>
+        <p:spPr>
+          <a:xfrm>
+            <a:off x="1805940" y="5349240"/>
+            <a:ext cx="982980" cy="320040"/>
           </a:xfrm>
           <a:prstGeom prst="rect">
             <a:avLst/>
@@ -2346,14 +2708,14 @@
       </p:sp>
       <p:sp>
         <p:nvSpPr>
-          <p:cNvPr id="10" name="Text 8"/>
-          <p:cNvSpPr/>
-          <p:nvPr/>
-        </p:nvSpPr>
-        <p:spPr>
-          <a:xfrm>
-            <a:off x="2971800" y="1463040"/>
-            <a:ext cx="1965960" cy="365760"/>
+          <p:cNvPr id="14" name="Text 10"/>
+          <p:cNvSpPr/>
+          <p:nvPr/>
+        </p:nvSpPr>
+        <p:spPr>
+          <a:xfrm>
+            <a:off x="2971800" y="2468880"/>
+            <a:ext cx="1965960" cy="320040"/>
           </a:xfrm>
           <a:prstGeom prst="rect">
             <a:avLst/>
@@ -2385,14 +2747,14 @@
       </p:sp>
       <p:sp>
         <p:nvSpPr>
-          <p:cNvPr id="11" name="Text 9"/>
-          <p:cNvSpPr/>
-          <p:nvPr/>
-        </p:nvSpPr>
-        <p:spPr>
-          <a:xfrm>
-            <a:off x="2971800" y="1874520"/>
-            <a:ext cx="1965960" cy="1371600"/>
+          <p:cNvPr id="15" name="Text 11"/>
+          <p:cNvSpPr/>
+          <p:nvPr/>
+        </p:nvSpPr>
+        <p:spPr>
+          <a:xfrm>
+            <a:off x="2971800" y="2834640"/>
+            <a:ext cx="1965960" cy="1188720"/>
           </a:xfrm>
           <a:prstGeom prst="rect">
             <a:avLst/>
@@ -2424,14 +2786,14 @@
       </p:sp>
       <p:sp>
         <p:nvSpPr>
-          <p:cNvPr id="12" name="Text 10"/>
-          <p:cNvSpPr/>
-          <p:nvPr/>
-        </p:nvSpPr>
-        <p:spPr>
-          <a:xfrm>
-            <a:off x="2971800" y="3337560"/>
-            <a:ext cx="1965960" cy="1188720"/>
+          <p:cNvPr id="16" name="Text 12"/>
+          <p:cNvSpPr/>
+          <p:nvPr/>
+        </p:nvSpPr>
+        <p:spPr>
+          <a:xfrm>
+            <a:off x="2971800" y="4114800"/>
+            <a:ext cx="1965960" cy="1051560"/>
           </a:xfrm>
           <a:prstGeom prst="rect">
             <a:avLst/>
@@ -2477,13 +2839,13 @@
       </p:sp>
       <p:sp>
         <p:nvSpPr>
-          <p:cNvPr id="13" name="Shape 11"/>
-          <p:cNvSpPr/>
-          <p:nvPr/>
-        </p:nvSpPr>
-        <p:spPr>
-          <a:xfrm>
-            <a:off x="2971800" y="5074920"/>
+          <p:cNvPr id="17" name="Shape 13"/>
+          <p:cNvSpPr/>
+          <p:nvPr/>
+        </p:nvSpPr>
+        <p:spPr>
+          <a:xfrm>
+            <a:off x="2971800" y="5257800"/>
             <a:ext cx="1965960" cy="0"/>
           </a:xfrm>
           <a:prstGeom prst="line">
@@ -2500,14 +2862,14 @@
       </p:sp>
       <p:sp>
         <p:nvSpPr>
-          <p:cNvPr id="14" name="Text 12"/>
-          <p:cNvSpPr/>
-          <p:nvPr/>
-        </p:nvSpPr>
-        <p:spPr>
-          <a:xfrm>
-            <a:off x="2971800" y="5166360"/>
-            <a:ext cx="982980" cy="365760"/>
+          <p:cNvPr id="18" name="Text 14"/>
+          <p:cNvSpPr/>
+          <p:nvPr/>
+        </p:nvSpPr>
+        <p:spPr>
+          <a:xfrm>
+            <a:off x="2971800" y="5349240"/>
+            <a:ext cx="982980" cy="320040"/>
           </a:xfrm>
           <a:prstGeom prst="rect">
             <a:avLst/>
@@ -2539,14 +2901,14 @@
       </p:sp>
       <p:sp>
         <p:nvSpPr>
-          <p:cNvPr id="15" name="Text 13"/>
-          <p:cNvSpPr/>
-          <p:nvPr/>
-        </p:nvSpPr>
-        <p:spPr>
-          <a:xfrm>
-            <a:off x="3954780" y="5166360"/>
-            <a:ext cx="982980" cy="365760"/>
+          <p:cNvPr id="19" name="Text 15"/>
+          <p:cNvSpPr/>
+          <p:nvPr/>
+        </p:nvSpPr>
+        <p:spPr>
+          <a:xfrm>
+            <a:off x="3954780" y="5349240"/>
+            <a:ext cx="982980" cy="320040"/>
           </a:xfrm>
           <a:prstGeom prst="rect">
             <a:avLst/>
@@ -2578,14 +2940,14 @@
       </p:sp>
       <p:sp>
         <p:nvSpPr>
-          <p:cNvPr id="16" name="Text 14"/>
-          <p:cNvSpPr/>
-          <p:nvPr/>
-        </p:nvSpPr>
-        <p:spPr>
-          <a:xfrm>
-            <a:off x="5120640" y="1463040"/>
-            <a:ext cx="1965960" cy="365760"/>
+          <p:cNvPr id="20" name="Text 16"/>
+          <p:cNvSpPr/>
+          <p:nvPr/>
+        </p:nvSpPr>
+        <p:spPr>
+          <a:xfrm>
+            <a:off x="5120640" y="2468880"/>
+            <a:ext cx="1965960" cy="320040"/>
           </a:xfrm>
           <a:prstGeom prst="rect">
             <a:avLst/>
@@ -2617,14 +2979,14 @@
       </p:sp>
       <p:sp>
         <p:nvSpPr>
-          <p:cNvPr id="17" name="Text 15"/>
-          <p:cNvSpPr/>
-          <p:nvPr/>
-        </p:nvSpPr>
-        <p:spPr>
-          <a:xfrm>
-            <a:off x="5120640" y="1874520"/>
-            <a:ext cx="1965960" cy="1371600"/>
+          <p:cNvPr id="21" name="Text 17"/>
+          <p:cNvSpPr/>
+          <p:nvPr/>
+        </p:nvSpPr>
+        <p:spPr>
+          <a:xfrm>
+            <a:off x="5120640" y="2834640"/>
+            <a:ext cx="1965960" cy="1188720"/>
           </a:xfrm>
           <a:prstGeom prst="rect">
             <a:avLst/>
@@ -2656,14 +3018,14 @@
       </p:sp>
       <p:sp>
         <p:nvSpPr>
-          <p:cNvPr id="18" name="Text 16"/>
-          <p:cNvSpPr/>
-          <p:nvPr/>
-        </p:nvSpPr>
-        <p:spPr>
-          <a:xfrm>
-            <a:off x="5120640" y="3337560"/>
-            <a:ext cx="1965960" cy="1188720"/>
+          <p:cNvPr id="22" name="Text 18"/>
+          <p:cNvSpPr/>
+          <p:nvPr/>
+        </p:nvSpPr>
+        <p:spPr>
+          <a:xfrm>
+            <a:off x="5120640" y="4114800"/>
+            <a:ext cx="1965960" cy="1051560"/>
           </a:xfrm>
           <a:prstGeom prst="rect">
             <a:avLst/>
@@ -2709,13 +3071,13 @@
       </p:sp>
       <p:sp>
         <p:nvSpPr>
-          <p:cNvPr id="19" name="Shape 17"/>
-          <p:cNvSpPr/>
-          <p:nvPr/>
-        </p:nvSpPr>
-        <p:spPr>
-          <a:xfrm>
-            <a:off x="5120640" y="5074920"/>
+          <p:cNvPr id="23" name="Shape 19"/>
+          <p:cNvSpPr/>
+          <p:nvPr/>
+        </p:nvSpPr>
+        <p:spPr>
+          <a:xfrm>
+            <a:off x="5120640" y="5257800"/>
             <a:ext cx="1965960" cy="0"/>
           </a:xfrm>
           <a:prstGeom prst="line">
@@ -2732,14 +3094,14 @@
       </p:sp>
       <p:sp>
         <p:nvSpPr>
-          <p:cNvPr id="20" name="Text 18"/>
-          <p:cNvSpPr/>
-          <p:nvPr/>
-        </p:nvSpPr>
-        <p:spPr>
-          <a:xfrm>
-            <a:off x="5120640" y="5166360"/>
-            <a:ext cx="982980" cy="365760"/>
+          <p:cNvPr id="24" name="Text 20"/>
+          <p:cNvSpPr/>
+          <p:nvPr/>
+        </p:nvSpPr>
+        <p:spPr>
+          <a:xfrm>
+            <a:off x="5120640" y="5349240"/>
+            <a:ext cx="982980" cy="320040"/>
           </a:xfrm>
           <a:prstGeom prst="rect">
             <a:avLst/>
@@ -2771,14 +3133,14 @@
       </p:sp>
       <p:sp>
         <p:nvSpPr>
-          <p:cNvPr id="21" name="Text 19"/>
-          <p:cNvSpPr/>
-          <p:nvPr/>
-        </p:nvSpPr>
-        <p:spPr>
-          <a:xfrm>
-            <a:off x="6103620" y="5166360"/>
-            <a:ext cx="982980" cy="365760"/>
+          <p:cNvPr id="25" name="Text 21"/>
+          <p:cNvSpPr/>
+          <p:nvPr/>
+        </p:nvSpPr>
+        <p:spPr>
+          <a:xfrm>
+            <a:off x="6103620" y="5349240"/>
+            <a:ext cx="982980" cy="320040"/>
           </a:xfrm>
           <a:prstGeom prst="rect">
             <a:avLst/>
@@ -2810,14 +3172,14 @@
       </p:sp>
       <p:sp>
         <p:nvSpPr>
-          <p:cNvPr id="22" name="Text 20"/>
-          <p:cNvSpPr/>
-          <p:nvPr/>
-        </p:nvSpPr>
-        <p:spPr>
-          <a:xfrm>
-            <a:off x="7269480" y="1463040"/>
-            <a:ext cx="1965960" cy="365760"/>
+          <p:cNvPr id="26" name="Text 22"/>
+          <p:cNvSpPr/>
+          <p:nvPr/>
+        </p:nvSpPr>
+        <p:spPr>
+          <a:xfrm>
+            <a:off x="7269480" y="2468880"/>
+            <a:ext cx="1965960" cy="320040"/>
           </a:xfrm>
           <a:prstGeom prst="rect">
             <a:avLst/>
@@ -2849,14 +3211,14 @@
       </p:sp>
       <p:sp>
         <p:nvSpPr>
-          <p:cNvPr id="23" name="Text 21"/>
-          <p:cNvSpPr/>
-          <p:nvPr/>
-        </p:nvSpPr>
-        <p:spPr>
-          <a:xfrm>
-            <a:off x="7269480" y="1874520"/>
-            <a:ext cx="1965960" cy="1371600"/>
+          <p:cNvPr id="27" name="Text 23"/>
+          <p:cNvSpPr/>
+          <p:nvPr/>
+        </p:nvSpPr>
+        <p:spPr>
+          <a:xfrm>
+            <a:off x="7269480" y="2834640"/>
+            <a:ext cx="1965960" cy="1188720"/>
           </a:xfrm>
           <a:prstGeom prst="rect">
             <a:avLst/>
@@ -2888,14 +3250,14 @@
       </p:sp>
       <p:sp>
         <p:nvSpPr>
-          <p:cNvPr id="24" name="Text 22"/>
-          <p:cNvSpPr/>
-          <p:nvPr/>
-        </p:nvSpPr>
-        <p:spPr>
-          <a:xfrm>
-            <a:off x="7269480" y="3337560"/>
-            <a:ext cx="1965960" cy="1188720"/>
+          <p:cNvPr id="28" name="Text 24"/>
+          <p:cNvSpPr/>
+          <p:nvPr/>
+        </p:nvSpPr>
+        <p:spPr>
+          <a:xfrm>
+            <a:off x="7269480" y="4114800"/>
+            <a:ext cx="1965960" cy="1051560"/>
           </a:xfrm>
           <a:prstGeom prst="rect">
             <a:avLst/>
@@ -2941,13 +3303,13 @@
       </p:sp>
       <p:sp>
         <p:nvSpPr>
-          <p:cNvPr id="25" name="Shape 23"/>
-          <p:cNvSpPr/>
-          <p:nvPr/>
-        </p:nvSpPr>
-        <p:spPr>
-          <a:xfrm>
-            <a:off x="7269480" y="5074920"/>
+          <p:cNvPr id="29" name="Shape 25"/>
+          <p:cNvSpPr/>
+          <p:nvPr/>
+        </p:nvSpPr>
+        <p:spPr>
+          <a:xfrm>
+            <a:off x="7269480" y="5257800"/>
             <a:ext cx="1965960" cy="0"/>
           </a:xfrm>
           <a:prstGeom prst="line">
@@ -2964,14 +3326,14 @@
       </p:sp>
       <p:sp>
         <p:nvSpPr>
-          <p:cNvPr id="26" name="Text 24"/>
-          <p:cNvSpPr/>
-          <p:nvPr/>
-        </p:nvSpPr>
-        <p:spPr>
-          <a:xfrm>
-            <a:off x="7269480" y="5166360"/>
-            <a:ext cx="982980" cy="365760"/>
+          <p:cNvPr id="30" name="Text 26"/>
+          <p:cNvSpPr/>
+          <p:nvPr/>
+        </p:nvSpPr>
+        <p:spPr>
+          <a:xfrm>
+            <a:off x="7269480" y="5349240"/>
+            <a:ext cx="982980" cy="320040"/>
           </a:xfrm>
           <a:prstGeom prst="rect">
             <a:avLst/>
@@ -3003,14 +3365,14 @@
       </p:sp>
       <p:sp>
         <p:nvSpPr>
-          <p:cNvPr id="27" name="Text 25"/>
-          <p:cNvSpPr/>
-          <p:nvPr/>
-        </p:nvSpPr>
-        <p:spPr>
-          <a:xfrm>
-            <a:off x="8252460" y="5166360"/>
-            <a:ext cx="982980" cy="365760"/>
+          <p:cNvPr id="31" name="Text 27"/>
+          <p:cNvSpPr/>
+          <p:nvPr/>
+        </p:nvSpPr>
+        <p:spPr>
+          <a:xfrm>
+            <a:off x="8252460" y="5349240"/>
+            <a:ext cx="982980" cy="320040"/>
           </a:xfrm>
           <a:prstGeom prst="rect">
             <a:avLst/>
@@ -3042,14 +3404,14 @@
       </p:sp>
       <p:sp>
         <p:nvSpPr>
-          <p:cNvPr id="28" name="Text 26"/>
-          <p:cNvSpPr/>
-          <p:nvPr/>
-        </p:nvSpPr>
-        <p:spPr>
-          <a:xfrm>
-            <a:off x="9418320" y="1463040"/>
-            <a:ext cx="1965960" cy="365760"/>
+          <p:cNvPr id="32" name="Text 28"/>
+          <p:cNvSpPr/>
+          <p:nvPr/>
+        </p:nvSpPr>
+        <p:spPr>
+          <a:xfrm>
+            <a:off x="9418320" y="2468880"/>
+            <a:ext cx="1965960" cy="320040"/>
           </a:xfrm>
           <a:prstGeom prst="rect">
             <a:avLst/>
@@ -3081,14 +3443,14 @@
       </p:sp>
       <p:sp>
         <p:nvSpPr>
-          <p:cNvPr id="29" name="Text 27"/>
-          <p:cNvSpPr/>
-          <p:nvPr/>
-        </p:nvSpPr>
-        <p:spPr>
-          <a:xfrm>
-            <a:off x="9418320" y="1874520"/>
-            <a:ext cx="1965960" cy="1371600"/>
+          <p:cNvPr id="33" name="Text 29"/>
+          <p:cNvSpPr/>
+          <p:nvPr/>
+        </p:nvSpPr>
+        <p:spPr>
+          <a:xfrm>
+            <a:off x="9418320" y="2834640"/>
+            <a:ext cx="1965960" cy="1188720"/>
           </a:xfrm>
           <a:prstGeom prst="rect">
             <a:avLst/>
@@ -3120,14 +3482,14 @@
       </p:sp>
       <p:sp>
         <p:nvSpPr>
-          <p:cNvPr id="30" name="Text 28"/>
-          <p:cNvSpPr/>
-          <p:nvPr/>
-        </p:nvSpPr>
-        <p:spPr>
-          <a:xfrm>
-            <a:off x="9418320" y="3337560"/>
-            <a:ext cx="1965960" cy="1188720"/>
+          <p:cNvPr id="34" name="Text 30"/>
+          <p:cNvSpPr/>
+          <p:nvPr/>
+        </p:nvSpPr>
+        <p:spPr>
+          <a:xfrm>
+            <a:off x="9418320" y="4114800"/>
+            <a:ext cx="1965960" cy="1051560"/>
           </a:xfrm>
           <a:prstGeom prst="rect">
             <a:avLst/>
@@ -3173,13 +3535,13 @@
       </p:sp>
       <p:sp>
         <p:nvSpPr>
-          <p:cNvPr id="31" name="Shape 29"/>
-          <p:cNvSpPr/>
-          <p:nvPr/>
-        </p:nvSpPr>
-        <p:spPr>
-          <a:xfrm>
-            <a:off x="9418320" y="5074920"/>
+          <p:cNvPr id="35" name="Shape 31"/>
+          <p:cNvSpPr/>
+          <p:nvPr/>
+        </p:nvSpPr>
+        <p:spPr>
+          <a:xfrm>
+            <a:off x="9418320" y="5257800"/>
             <a:ext cx="1965960" cy="0"/>
           </a:xfrm>
           <a:prstGeom prst="line">
@@ -3196,14 +3558,14 @@
       </p:sp>
       <p:sp>
         <p:nvSpPr>
-          <p:cNvPr id="32" name="Text 30"/>
-          <p:cNvSpPr/>
-          <p:nvPr/>
-        </p:nvSpPr>
-        <p:spPr>
-          <a:xfrm>
-            <a:off x="9418320" y="5166360"/>
-            <a:ext cx="982980" cy="365760"/>
+          <p:cNvPr id="36" name="Text 32"/>
+          <p:cNvSpPr/>
+          <p:nvPr/>
+        </p:nvSpPr>
+        <p:spPr>
+          <a:xfrm>
+            <a:off x="9418320" y="5349240"/>
+            <a:ext cx="982980" cy="320040"/>
           </a:xfrm>
           <a:prstGeom prst="rect">
             <a:avLst/>
@@ -3235,14 +3597,14 @@
       </p:sp>
       <p:sp>
         <p:nvSpPr>
-          <p:cNvPr id="33" name="Text 31"/>
-          <p:cNvSpPr/>
-          <p:nvPr/>
-        </p:nvSpPr>
-        <p:spPr>
-          <a:xfrm>
-            <a:off x="10401300" y="5166360"/>
-            <a:ext cx="982980" cy="365760"/>
+          <p:cNvPr id="37" name="Text 33"/>
+          <p:cNvSpPr/>
+          <p:nvPr/>
+        </p:nvSpPr>
+        <p:spPr>
+          <a:xfrm>
+            <a:off x="10401300" y="5349240"/>
+            <a:ext cx="982980" cy="320040"/>
           </a:xfrm>
           <a:prstGeom prst="rect">
             <a:avLst/>
@@ -3274,13 +3636,13 @@
       </p:sp>
       <p:sp>
         <p:nvSpPr>
-          <p:cNvPr id="34" name="Text 32"/>
-          <p:cNvSpPr/>
-          <p:nvPr/>
-        </p:nvSpPr>
-        <p:spPr>
-          <a:xfrm>
-            <a:off x="822960" y="5943600"/>
+          <p:cNvPr id="38" name="Text 34"/>
+          <p:cNvSpPr/>
+          <p:nvPr/>
+        </p:nvSpPr>
+        <p:spPr>
+          <a:xfrm>
+            <a:off x="822960" y="5989320"/>
             <a:ext cx="5486400" cy="274320"/>
           </a:xfrm>
           <a:prstGeom prst="rect">
@@ -3338,14 +3700,112 @@
       </p:grpSpPr>
       <p:sp>
         <p:nvSpPr>
-          <p:cNvPr id="2" name="Text 0"/>
+          <p:cNvPr id="2" name="Shape 0"/>
+          <p:cNvSpPr/>
+          <p:nvPr/>
+        </p:nvSpPr>
+        <p:spPr>
+          <a:xfrm>
+            <a:off x="0" y="640080"/>
+            <a:ext cx="12191695" cy="0"/>
+          </a:xfrm>
+          <a:prstGeom prst="line">
+            <a:avLst/>
+          </a:prstGeom>
+          <a:noFill/>
+          <a:ln w="9525">
+            <a:solidFill>
+              <a:srgbClr val="EEEEEE"/>
+            </a:solidFill>
+            <a:prstDash val="solid"/>
+          </a:ln>
+        </p:spPr>
+      </p:sp>
+      <p:pic>
+        <p:nvPicPr>
+          <p:cNvPr id="3" name="Image 0" descr="/Users/phoenixlab/Projects/sharp/sharpdigital-proposal-template/img/sharp_logo.svg">    </p:cNvPr>
+          <p:cNvPicPr>
+            <a:picLocks noChangeAspect="1"/>
+          </p:cNvPicPr>
+          <p:nvPr/>
+        </p:nvPicPr>
+        <p:blipFill>
+          <a:blip r:embed="rId1">
+            <a:extLst>
+              <a:ext uri="{96DAC541-7B7A-43D3-8B79-37D633B846F1}">
+                <asvg:svgBlip xmlns:asvg="http://schemas.microsoft.com/office/drawing/2016/SVG/main" r:embed="rId2"/>
+              </a:ext>
+            </a:extLst>
+          </a:blip>
+          <a:stretch>
+            <a:fillRect/>
+          </a:stretch>
+        </p:blipFill>
+        <p:spPr>
+          <a:xfrm>
+            <a:off x="457200" y="137160"/>
+            <a:ext cx="1280160" cy="365760"/>
+          </a:xfrm>
+          <a:prstGeom prst="rect">
+            <a:avLst/>
+          </a:prstGeom>
+        </p:spPr>
+      </p:pic>
+      <p:pic>
+        <p:nvPicPr>
+          <p:cNvPr id="4" name="Image 1" descr="/Users/phoenixlab/Projects/sharp/sharpdigital-proposal-template/public/img/contact_bg.jpg">    </p:cNvPr>
+          <p:cNvPicPr>
+            <a:picLocks noChangeAspect="1"/>
+          </p:cNvPicPr>
+          <p:nvPr/>
+        </p:nvPicPr>
+        <p:blipFill>
+          <a:blip r:embed="rId3"/>
+          <a:srcRect l="0" r="0" t="0" b="0"/>
+          <a:stretch/>
+        </p:blipFill>
+        <p:spPr>
+          <a:xfrm>
+            <a:off x="0" y="640080"/>
+            <a:ext cx="12191695" cy="1691640"/>
+          </a:xfrm>
+          <a:prstGeom prst="rect">
+            <a:avLst/>
+          </a:prstGeom>
+        </p:spPr>
+      </p:pic>
+      <p:sp>
+        <p:nvSpPr>
+          <p:cNvPr id="5" name="Shape 1"/>
+          <p:cNvSpPr/>
+          <p:nvPr/>
+        </p:nvSpPr>
+        <p:spPr>
+          <a:xfrm>
+            <a:off x="0" y="640080"/>
+            <a:ext cx="12191695" cy="1691640"/>
+          </a:xfrm>
+          <a:prstGeom prst="rect">
+            <a:avLst/>
+          </a:prstGeom>
+          <a:solidFill>
+            <a:srgbClr val="333333">
+              <a:alpha val="65000"/>
+            </a:srgbClr>
+          </a:solidFill>
+          <a:ln/>
+        </p:spPr>
+      </p:sp>
+      <p:sp>
+        <p:nvSpPr>
+          <p:cNvPr id="6" name="Text 2"/>
           <p:cNvSpPr/>
           <p:nvPr/>
         </p:nvSpPr>
         <p:spPr>
           <a:xfrm>
             <a:off x="822960" y="640080"/>
-            <a:ext cx="10515600" cy="640080"/>
+            <a:ext cx="10515600" cy="1691640"/>
           </a:xfrm>
           <a:prstGeom prst="rect">
             <a:avLst/>
@@ -3357,13 +3817,13 @@
           <a:bodyPr wrap="square" rtlCol="0" anchor="ctr"/>
           <a:lstStyle/>
           <a:p>
-            <a:pPr indent="0" marL="0">
+            <a:pPr algn="l" indent="0" marL="0">
               <a:buNone/>
             </a:pPr>
             <a:r>
               <a:rPr lang="en-US" sz="3600" dirty="0">
                 <a:solidFill>
-                  <a:srgbClr val="333333"/>
+                  <a:srgbClr val="FFFFFF"/>
                 </a:solidFill>
                 <a:latin typeface="Manrope" pitchFamily="34" charset="0"/>
                 <a:ea typeface="Manrope" pitchFamily="34" charset="-122"/>
@@ -3377,14 +3837,14 @@
       </p:sp>
       <p:sp>
         <p:nvSpPr>
-          <p:cNvPr id="3" name="Shape 1"/>
-          <p:cNvSpPr/>
-          <p:nvPr/>
-        </p:nvSpPr>
-        <p:spPr>
-          <a:xfrm>
-            <a:off x="822960" y="1325880"/>
-            <a:ext cx="2743200" cy="36576"/>
+          <p:cNvPr id="7" name="Shape 3"/>
+          <p:cNvSpPr/>
+          <p:nvPr/>
+        </p:nvSpPr>
+        <p:spPr>
+          <a:xfrm>
+            <a:off x="822960" y="2221992"/>
+            <a:ext cx="1645920" cy="54864"/>
           </a:xfrm>
           <a:prstGeom prst="rect">
             <a:avLst/>
@@ -3402,13 +3862,13 @@
       </p:sp>
       <p:sp>
         <p:nvSpPr>
-          <p:cNvPr id="4" name="Text 2"/>
-          <p:cNvSpPr/>
-          <p:nvPr/>
-        </p:nvSpPr>
-        <p:spPr>
-          <a:xfrm>
-            <a:off x="822960" y="1828800"/>
+          <p:cNvPr id="8" name="Text 4"/>
+          <p:cNvSpPr/>
+          <p:nvPr/>
+        </p:nvSpPr>
+        <p:spPr>
+          <a:xfrm>
+            <a:off x="822960" y="2468880"/>
             <a:ext cx="10515600" cy="2743200"/>
           </a:xfrm>
           <a:prstGeom prst="rect">
@@ -3478,7 +3938,7 @@
       </p:sp>
       <p:sp>
         <p:nvSpPr>
-          <p:cNvPr id="5" name="Text 3"/>
+          <p:cNvPr id="9" name="Text 5"/>
           <p:cNvSpPr/>
           <p:nvPr/>
         </p:nvSpPr>
